--- a/assets/powerpoints/module-n2-bonjour/E1-je-me-lance.pptx
+++ b/assets/powerpoints/module-n2-bonjour/E1-je-me-lance.pptx
@@ -8823,7 +8823,25 @@
                 </a:solidFill>
                 <a:latin typeface="Verdana"/>
               </a:rPr>
-              <a:t>« &lt;b&gt;Merci&lt;/b&gt;, mais je travaille à six heures. » On remercie d'abord, on dit la raison ensuite, en une phrase courte au présent. On ne s'excuse pas longuement : ça met l'autre mal à l'aise.</a:t>
+              <a:t>« </a:t>
+            </a:r>
+            <a:r>
+              <a:rPr sz="2000" b="1" i="0">
+                <a:solidFill>
+                  <a:srgbClr val="4B4F52"/>
+                </a:solidFill>
+                <a:latin typeface="Verdana"/>
+              </a:rPr>
+              <a:t>Merci</a:t>
+            </a:r>
+            <a:r>
+              <a:rPr sz="2000" b="0" i="0">
+                <a:solidFill>
+                  <a:srgbClr val="4B4F52"/>
+                </a:solidFill>
+                <a:latin typeface="Verdana"/>
+              </a:rPr>
+              <a:t>, mais je travaille à six heures. » On remercie d'abord, on dit la raison ensuite, en une phrase courte au présent. On ne s'excuse pas longuement : ça met l'autre mal à l'aise.</a:t>
             </a:r>
           </a:p>
         </p:txBody>
